--- a/projects/templates/template_pitch_deck/output/pptx/template_template_pitch_medium.pptx
+++ b/projects/templates/template_pitch_deck/output/pptx/template_template_pitch_medium.pptx
@@ -4707,7 +4707,7 @@
                   <a:srgbClr val="B3131A"/>
                 </a:solidFill>
               </a:rPr>
-              <a:t>147 tests</a:t>
+              <a:t>153 tests</a:t>
             </a:r>
           </a:p>
         </p:txBody>
@@ -4740,7 +4740,7 @@
                   <a:srgbClr val="0A0A0A"/>
                 </a:solidFill>
               </a:rPr>
-              <a:t>97.66% coverage on template_template's own source — the same gate every exemplar in the repo must pass.</a:t>
+              <a:t>97.07% coverage on template_template's own source — the same gate every exemplar in the repo must pass.</a:t>
             </a:r>
           </a:p>
         </p:txBody>
@@ -4963,7 +4963,7 @@
             </a:r>
             <a:br/>
             <a:r>
-              <a:t>exactly as they do to the 24 other exemplars.</a:t>
+              <a:t>exactly as they do to the 25 other exemplars.</a:t>
             </a:r>
           </a:p>
           <a:p>
@@ -5177,7 +5177,7 @@
         <p:spPr>
           <a:xfrm>
             <a:off x="502920" y="1070305"/>
-            <a:ext cx="8138160" cy="1755267"/>
+            <a:ext cx="8138160" cy="1488567"/>
           </a:xfrm>
           <a:prstGeom prst="rect">
             <a:avLst/>
@@ -5205,11 +5205,7 @@
               </a:defRPr>
             </a:pPr>
             <a:r>
-              <a:t>• Concept DOI 10.5281/zenodo.20419007, with a version-specific Zenodo</a:t>
-            </a:r>
-            <a:br/>
-            <a:r>
-              <a:t>deposit for the current release.</a:t>
+              <a:t>• Concept DOI 10.5281/zenodo.20419007. Intended v2.0.0 is unreleased.</a:t>
             </a:r>
           </a:p>
           <a:p>
@@ -5228,11 +5224,11 @@
               </a:defRPr>
             </a:pPr>
             <a:r>
-              <a:t>• 9 durable publication records on file: Zenodo, GitHub, PyPI (sandbox), IPFS,</a:t>
+              <a:t>• Prior v1.0.9 has 9 historical references: Zenodo, GitHub, PyPI (sandbox),</a:t>
             </a:r>
             <a:br/>
             <a:r>
-              <a:t>Software Heritage, GitHub Pages, Netlify, Hugging Face, OSF.</a:t>
+              <a:t>IPFS, Software Heritage, GitHub Pages, Netlify, Hugging Face, OSF.</a:t>
             </a:r>
           </a:p>
           <a:p>
@@ -5645,7 +5641,7 @@
               </a:defRPr>
             </a:pPr>
             <a:r>
-              <a:t>• projects/templates/ holds all 24 public exemplars: template_active_inference,</a:t>
+              <a:t>• projects/templates/ holds all 25 public exemplars: template_active_inference,</a:t>
             </a:r>
             <a:br/>
             <a:r>
@@ -5661,19 +5657,19 @@
             </a:r>
             <a:br/>
             <a:r>
-              <a:t>template_formal, template_gold_refinement, template_literature_meta_analysis,</a:t>
+              <a:t>template_experiment_tree, template_formal, template_gold_refinement,</a:t>
             </a:r>
             <a:br/>
             <a:r>
-              <a:t>template_madlib, template_methods_paper, template_newspaper,</a:t>
+              <a:t>template_literature_meta_analysis, template_madlib, template_methods_paper,</a:t>
             </a:r>
             <a:br/>
             <a:r>
-              <a:t>template_pitch_deck, template_pools_rules_tools, template_prose_project,</a:t>
+              <a:t>template_newspaper, template_pitch_deck, template_pools_rules_tools,</a:t>
             </a:r>
             <a:br/>
             <a:r>
-              <a:t>template_redacted_report, template_registered_report,</a:t>
+              <a:t>template_prose_project, template_redacted_report, template_registered_report,</a:t>
             </a:r>
             <a:br/>
             <a:r>
@@ -5931,7 +5927,7 @@
             </a:r>
             <a:br/>
             <a:r>
-              <a:t>add — the contract is uniform across all 24 projects, and the folder itself is the</a:t>
+              <a:t>add — the contract is uniform across all 25 projects, and the folder itself is the</a:t>
             </a:r>
             <a:br/>
             <a:r>
@@ -7304,7 +7300,7 @@
                 </a:solidFill>
                 <a:hlinkClick r:id="rId3"/>
               </a:rPr>
-              <a:t>Source: projects/templates/template_pitch_deck/src/token_resolution.py</a:t>
+              <a:t>Source: projects/templates/template_pitch_deck/src/template_pitch_deck/token_resolution.py</a:t>
             </a:r>
           </a:p>
         </p:txBody>
@@ -7489,7 +7485,7 @@
               </a:defRPr>
             </a:pPr>
             <a:r>
-              <a:t>• Every one of 24 public exemplars is measured independently, not summarized</a:t>
+              <a:t>• Every one of 25 public exemplars is measured independently, not summarized</a:t>
             </a:r>
             <a:br/>
             <a:r>
@@ -7516,7 +7512,7 @@
             </a:r>
             <a:br/>
             <a:r>
-              <a:t>docs/_generated/COUNTS.md factsheet this deck's own 97.66% figure comes</a:t>
+              <a:t>docs/_generated/COUNTS.md factsheet this deck's own 97.07% figure comes</a:t>
             </a:r>
             <a:br/>
             <a:r>
@@ -7718,8 +7714,8 @@
         </p:blipFill>
         <p:spPr>
           <a:xfrm>
-            <a:off x="2126158" y="914400"/>
-            <a:ext cx="4891682" cy="3415284"/>
+            <a:off x="2223992" y="914400"/>
+            <a:ext cx="4696015" cy="3415284"/>
           </a:xfrm>
           <a:prstGeom prst="rect">
             <a:avLst/>
@@ -8241,7 +8237,7 @@
                 </a:solidFill>
                 <a:hlinkClick r:id="rId2"/>
               </a:rPr>
-              <a:t>Source: projects/templates/template_pitch_deck/src/diligence_audit.py</a:t>
+              <a:t>Source: projects/templates/template_pitch_deck/src/template_pitch_deck/diligence_audit.py</a:t>
             </a:r>
           </a:p>
         </p:txBody>
@@ -8522,7 +8518,7 @@
                 </a:solidFill>
                 <a:hlinkClick r:id="rId2"/>
               </a:rPr>
-              <a:t>Source: projects/templates/template_pitch_deck/src/standalone_slides.py</a:t>
+              <a:t>Source: projects/templates/template_pitch_deck/src/template_pitch_deck/standalone_slides.py</a:t>
             </a:r>
           </a:p>
         </p:txBody>
@@ -9326,15 +9322,15 @@
               </a:defRPr>
             </a:pPr>
             <a:r>
-              <a:t>• 25 importable subpackages, 752 tracked Python files total under infrastructure/</a:t>
+              <a:t>• 28 importable subpackages, 1302 tracked Python files total under</a:t>
             </a:r>
             <a:br/>
             <a:r>
-              <a:t>— a real inventory anyone can `git ls-files` themselves, not a claimed</a:t>
+              <a:t>infrastructure/ — a real inventory anyone can `git ls-files` themselves, not a</a:t>
             </a:r>
             <a:br/>
             <a:r>
-              <a:t>abstraction.</a:t>
+              <a:t>claimed abstraction.</a:t>
             </a:r>
           </a:p>
           <a:p>
@@ -9353,11 +9349,11 @@
               </a:defRPr>
             </a:pPr>
             <a:r>
-              <a:t>• The largest single subpackage, core, holds 129 files — still a minority of the</a:t>
+              <a:t>• The largest single subpackage, reporting, holds 399 files — still a minority of</a:t>
             </a:r>
             <a:br/>
             <a:r>
-              <a:t>whole, not a monolith wearing a modular label.</a:t>
+              <a:t>the whole, not a monolith wearing a modular label.</a:t>
             </a:r>
           </a:p>
           <a:p>
@@ -9403,7 +9399,7 @@
               </a:defRPr>
             </a:pPr>
             <a:r>
-              <a:t>• The next chart narrows the total to importable subpackages, excluding 2</a:t>
+              <a:t>• The next chart narrows the total to importable subpackages, excluding 3</a:t>
             </a:r>
             <a:br/>
             <a:r>
@@ -9441,7 +9437,7 @@
                 </a:solidFill>
                 <a:hlinkClick r:id="rId2"/>
               </a:rPr>
-              <a:t>Source: projects/templates/template_pitch_deck/src/infra_facts.py</a:t>
+              <a:t>Source: projects/templates/template_pitch_deck/src/template_pitch_deck/infra_facts.py</a:t>
             </a:r>
           </a:p>
         </p:txBody>
@@ -9642,7 +9638,7 @@
                 </a:solidFill>
                 <a:hlinkClick r:id="rId3"/>
               </a:rPr>
-              <a:t>Source: projects/templates/template_pitch_deck/src/infra_facts.py</a:t>
+              <a:t>Source: projects/templates/template_pitch_deck/src/template_pitch_deck/infra_facts.py</a:t>
             </a:r>
           </a:p>
         </p:txBody>
@@ -11202,7 +11198,7 @@
               </a:defRPr>
             </a:pPr>
             <a:r>
-              <a:t>• One of 24 public exemplar templates in the same monorepo, each</a:t>
+              <a:t>• One of 25 public exemplar templates in the same monorepo, each</a:t>
             </a:r>
             <a:br/>
             <a:r>
@@ -11828,11 +11824,11 @@
               </a:defRPr>
             </a:pPr>
             <a:r>
-              <a:t>• src/template_template/introspection.py discovers infrastructure/ subpackages,</a:t>
+              <a:t>• src/template_template/core/introspection.py discovers infrastructure/</a:t>
             </a:r>
             <a:br/>
             <a:r>
-              <a:t>the pipeline.yaml stage DAG, and the public exemplar roster.</a:t>
+              <a:t>subpackages, the pipeline.yaml stage DAG, and the public exemplar roster.</a:t>
             </a:r>
           </a:p>
           <a:p>

--- a/projects/templates/template_pitch_deck/output/pptx/template_template_pitch_medium.pptx
+++ b/projects/templates/template_pitch_deck/output/pptx/template_template_pitch_medium.pptx
@@ -4707,7 +4707,7 @@
                   <a:srgbClr val="B3131A"/>
                 </a:solidFill>
               </a:rPr>
-              <a:t>153 tests</a:t>
+              <a:t>154 tests</a:t>
             </a:r>
           </a:p>
         </p:txBody>
@@ -9322,7 +9322,7 @@
               </a:defRPr>
             </a:pPr>
             <a:r>
-              <a:t>• 28 importable subpackages, 1302 tracked Python files total under</a:t>
+              <a:t>• 28 importable subpackages, 1321 tracked Python files total under</a:t>
             </a:r>
             <a:br/>
             <a:r>
@@ -9349,7 +9349,7 @@
               </a:defRPr>
             </a:pPr>
             <a:r>
-              <a:t>• The largest single subpackage, reporting, holds 399 files — still a minority of</a:t>
+              <a:t>• The largest single subpackage, reporting, holds 406 files — still a minority of</a:t>
             </a:r>
             <a:br/>
             <a:r>

--- a/projects/templates/template_pitch_deck/output/pptx/template_template_pitch_medium.pptx
+++ b/projects/templates/template_pitch_deck/output/pptx/template_template_pitch_medium.pptx
@@ -9322,7 +9322,7 @@
               </a:defRPr>
             </a:pPr>
             <a:r>
-              <a:t>• 28 importable subpackages, 1321 tracked Python files total under</a:t>
+              <a:t>• 28 importable subpackages, 1324 tracked Python files total under</a:t>
             </a:r>
             <a:br/>
             <a:r>

--- a/projects/templates/template_pitch_deck/output/pptx/template_template_pitch_medium.pptx
+++ b/projects/templates/template_pitch_deck/output/pptx/template_template_pitch_medium.pptx
@@ -4707,7 +4707,7 @@
                   <a:srgbClr val="B3131A"/>
                 </a:solidFill>
               </a:rPr>
-              <a:t>154 tests</a:t>
+              <a:t>158 tests</a:t>
             </a:r>
           </a:p>
         </p:txBody>
@@ -4740,7 +4740,7 @@
                   <a:srgbClr val="0A0A0A"/>
                 </a:solidFill>
               </a:rPr>
-              <a:t>97.07% coverage on template_template's own source — the same gate every exemplar in the repo must pass.</a:t>
+              <a:t>95.56% coverage on template_template's own source — the same gate every exemplar in the repo must pass.</a:t>
             </a:r>
           </a:p>
         </p:txBody>
@@ -7512,7 +7512,7 @@
             </a:r>
             <a:br/>
             <a:r>
-              <a:t>docs/_generated/COUNTS.md factsheet this deck's own 97.07% figure comes</a:t>
+              <a:t>docs/_generated/COUNTS.md factsheet this deck's own 95.56% figure comes</a:t>
             </a:r>
             <a:br/>
             <a:r>
@@ -9322,7 +9322,7 @@
               </a:defRPr>
             </a:pPr>
             <a:r>
-              <a:t>• 28 importable subpackages, 1324 tracked Python files total under</a:t>
+              <a:t>• 28 importable subpackages, 1339 tracked Python files total under</a:t>
             </a:r>
             <a:br/>
             <a:r>
@@ -9349,7 +9349,7 @@
               </a:defRPr>
             </a:pPr>
             <a:r>
-              <a:t>• The largest single subpackage, reporting, holds 406 files — still a minority of</a:t>
+              <a:t>• The largest single subpackage, reporting, holds 409 files — still a minority of</a:t>
             </a:r>
             <a:br/>
             <a:r>

--- a/projects/templates/template_pitch_deck/output/pptx/template_template_pitch_medium.pptx
+++ b/projects/templates/template_pitch_deck/output/pptx/template_template_pitch_medium.pptx
@@ -4696,8 +4696,8 @@
           <a:noFill/>
         </p:spPr>
         <p:txBody>
-          <a:bodyPr wrap="none">
-            <a:spAutoFit/>
+          <a:bodyPr wrap="none" lIns="0" rIns="0" tIns="0" bIns="0">
+            <a:noAutofit/>
           </a:bodyPr>
           <a:lstStyle/>
           <a:p>
@@ -4706,6 +4706,7 @@
                 <a:solidFill>
                   <a:srgbClr val="B3131A"/>
                 </a:solidFill>
+                <a:latin typeface="Helvetica"/>
               </a:rPr>
               <a:t>158 tests</a:t>
             </a:r>
@@ -4963,7 +4964,7 @@
             </a:r>
             <a:br/>
             <a:r>
-              <a:t>exactly as they do to the 25 other exemplars.</a:t>
+              <a:t>exactly as they do across all 25 exemplars.</a:t>
             </a:r>
           </a:p>
           <a:p>
@@ -9403,7 +9404,7 @@
             </a:r>
             <a:br/>
             <a:r>
-              <a:t>top-level file(s): infrastructure/__init__.py and mcp_server.py.</a:t>
+              <a:t>top-level Python file(s).</a:t>
             </a:r>
           </a:p>
         </p:txBody>

--- a/projects/templates/template_pitch_deck/output/pptx/template_template_pitch_medium.pptx
+++ b/projects/templates/template_pitch_deck/output/pptx/template_template_pitch_medium.pptx
@@ -4741,7 +4741,7 @@
                   <a:srgbClr val="0A0A0A"/>
                 </a:solidFill>
               </a:rPr>
-              <a:t>95.56% coverage on template_template's own source — the same gate every exemplar in the repo must pass.</a:t>
+              <a:t>95.57% coverage on template_template's own source — the same gate every exemplar in the repo must pass.</a:t>
             </a:r>
           </a:p>
         </p:txBody>
@@ -7513,7 +7513,7 @@
             </a:r>
             <a:br/>
             <a:r>
-              <a:t>docs/_generated/COUNTS.md factsheet this deck's own 95.56% figure comes</a:t>
+              <a:t>docs/_generated/COUNTS.md factsheet this deck's own 95.57% figure comes</a:t>
             </a:r>
             <a:br/>
             <a:r>
@@ -9323,7 +9323,7 @@
               </a:defRPr>
             </a:pPr>
             <a:r>
-              <a:t>• 28 importable subpackages, 1339 tracked Python files total under</a:t>
+              <a:t>• 28 importable subpackages, 1351 tracked Python files total under</a:t>
             </a:r>
             <a:br/>
             <a:r>
@@ -9350,7 +9350,7 @@
               </a:defRPr>
             </a:pPr>
             <a:r>
-              <a:t>• The largest single subpackage, reporting, holds 409 files — still a minority of</a:t>
+              <a:t>• The largest single subpackage, reporting, holds 411 files — still a minority of</a:t>
             </a:r>
             <a:br/>
             <a:r>

--- a/projects/templates/template_pitch_deck/output/pptx/template_template_pitch_medium.pptx
+++ b/projects/templates/template_pitch_deck/output/pptx/template_template_pitch_medium.pptx
@@ -4708,7 +4708,7 @@
                 </a:solidFill>
                 <a:latin typeface="Helvetica"/>
               </a:rPr>
-              <a:t>158 tests</a:t>
+              <a:t>161 tests</a:t>
             </a:r>
           </a:p>
         </p:txBody>
@@ -4741,7 +4741,7 @@
                   <a:srgbClr val="0A0A0A"/>
                 </a:solidFill>
               </a:rPr>
-              <a:t>95.57% coverage on template_template's own source — the same gate every exemplar in the repo must pass.</a:t>
+              <a:t>95.55% coverage on template_template's own source — the same gate every exemplar in the repo must pass.</a:t>
             </a:r>
           </a:p>
         </p:txBody>
@@ -7513,7 +7513,7 @@
             </a:r>
             <a:br/>
             <a:r>
-              <a:t>docs/_generated/COUNTS.md factsheet this deck's own 95.57% figure comes</a:t>
+              <a:t>docs/_generated/COUNTS.md factsheet this deck's own 95.55% figure comes</a:t>
             </a:r>
             <a:br/>
             <a:r>

--- a/projects/templates/template_pitch_deck/output/pptx/template_template_pitch_medium.pptx
+++ b/projects/templates/template_pitch_deck/output/pptx/template_template_pitch_medium.pptx
@@ -9323,7 +9323,7 @@
               </a:defRPr>
             </a:pPr>
             <a:r>
-              <a:t>• 28 importable subpackages, 1351 tracked Python files total under</a:t>
+              <a:t>• 28 importable subpackages, 1352 tracked Python files total under</a:t>
             </a:r>
             <a:br/>
             <a:r>
